--- a/chapter1/parts/part-05-exploring-a-dataset/clip.pptx
+++ b/chapter1/parts/part-05-exploring-a-dataset/clip.pptx
@@ -4185,10 +4185,12 @@
           </a:bodyPr>
           <a:lstStyle/>
           <a:p>
-            <a:pPr>
+            <a:pPr lvl="0" marL="457200" indent="-228600">
+              <a:buFont typeface="Calibri"/>
               <a:spcAft>
                 <a:spcPts val="1000"/>
               </a:spcAft>
+              <a:buSzPct val="100000"/>
               <a:buChar char="•"/>
               <a:lnSpc>
                 <a:spcPts val="2200"/>
@@ -4324,10 +4326,12 @@
           </a:bodyPr>
           <a:lstStyle/>
           <a:p>
-            <a:pPr>
+            <a:pPr lvl="0" marL="457200" indent="-228600">
+              <a:buFont typeface="Calibri"/>
               <a:spcAft>
                 <a:spcPts val="1000"/>
               </a:spcAft>
+              <a:buSzPct val="100000"/>
               <a:buChar char="•"/>
               <a:lnSpc>
                 <a:spcPts val="2200"/>
@@ -4344,10 +4348,12 @@
             </a:r>
           </a:p>
           <a:p>
-            <a:pPr>
+            <a:pPr lvl="0" marL="457200" indent="-228600">
+              <a:buFont typeface="Calibri"/>
               <a:spcAft>
                 <a:spcPts val="1000"/>
               </a:spcAft>
+              <a:buSzPct val="100000"/>
               <a:buChar char="•"/>
               <a:lnSpc>
                 <a:spcPts val="2200"/>
@@ -4483,10 +4489,12 @@
           </a:bodyPr>
           <a:lstStyle/>
           <a:p>
-            <a:pPr>
+            <a:pPr lvl="0" marL="457200" indent="-228600">
+              <a:buFont typeface="Calibri"/>
               <a:spcAft>
                 <a:spcPts val="1000"/>
               </a:spcAft>
+              <a:buSzPct val="100000"/>
               <a:buChar char="•"/>
               <a:lnSpc>
                 <a:spcPts val="2200"/>
@@ -4503,10 +4511,12 @@
             </a:r>
           </a:p>
           <a:p>
-            <a:pPr>
+            <a:pPr lvl="0" marL="457200" indent="-228600">
+              <a:buFont typeface="Calibri"/>
               <a:spcAft>
                 <a:spcPts val="1000"/>
               </a:spcAft>
+              <a:buSzPct val="100000"/>
               <a:buChar char="•"/>
               <a:lnSpc>
                 <a:spcPts val="2200"/>
@@ -4642,10 +4652,12 @@
           </a:bodyPr>
           <a:lstStyle/>
           <a:p>
-            <a:pPr>
+            <a:pPr lvl="0" marL="457200" indent="-228600">
+              <a:buFont typeface="Calibri"/>
               <a:spcAft>
                 <a:spcPts val="1000"/>
               </a:spcAft>
+              <a:buSzPct val="100000"/>
               <a:buChar char="•"/>
               <a:lnSpc>
                 <a:spcPts val="2200"/>
@@ -4662,10 +4674,12 @@
             </a:r>
           </a:p>
           <a:p>
-            <a:pPr>
+            <a:pPr lvl="0" marL="457200" indent="-228600">
+              <a:buFont typeface="Calibri"/>
               <a:spcAft>
                 <a:spcPts val="1000"/>
               </a:spcAft>
+              <a:buSzPct val="100000"/>
               <a:buChar char="•"/>
               <a:lnSpc>
                 <a:spcPts val="2200"/>
@@ -4682,10 +4696,12 @@
             </a:r>
           </a:p>
           <a:p>
-            <a:pPr>
+            <a:pPr lvl="0" marL="457200" indent="-228600">
+              <a:buFont typeface="Calibri"/>
               <a:spcAft>
                 <a:spcPts val="1000"/>
               </a:spcAft>
+              <a:buSzPct val="100000"/>
               <a:buChar char="•"/>
               <a:lnSpc>
                 <a:spcPts val="2200"/>
@@ -4702,10 +4718,12 @@
             </a:r>
           </a:p>
           <a:p>
-            <a:pPr>
+            <a:pPr lvl="0" marL="457200" indent="-228600">
+              <a:buFont typeface="Calibri"/>
               <a:spcAft>
                 <a:spcPts val="1000"/>
               </a:spcAft>
+              <a:buSzPct val="100000"/>
               <a:buChar char="•"/>
               <a:lnSpc>
                 <a:spcPts val="2200"/>
@@ -4722,10 +4740,12 @@
             </a:r>
           </a:p>
           <a:p>
-            <a:pPr>
+            <a:pPr lvl="0" marL="457200" indent="-228600">
+              <a:buFont typeface="Calibri"/>
               <a:spcAft>
                 <a:spcPts val="1000"/>
               </a:spcAft>
+              <a:buSzPct val="100000"/>
               <a:buChar char="•"/>
               <a:lnSpc>
                 <a:spcPts val="2200"/>
@@ -4861,10 +4881,12 @@
           </a:bodyPr>
           <a:lstStyle/>
           <a:p>
-            <a:pPr>
+            <a:pPr lvl="0" marL="457200" indent="-228600">
+              <a:buFont typeface="Calibri"/>
               <a:spcAft>
                 <a:spcPts val="1000"/>
               </a:spcAft>
+              <a:buSzPct val="100000"/>
               <a:buChar char="•"/>
               <a:lnSpc>
                 <a:spcPts val="2200"/>
@@ -4881,10 +4903,12 @@
             </a:r>
           </a:p>
           <a:p>
-            <a:pPr>
+            <a:pPr lvl="0" marL="457200" indent="-228600">
+              <a:buFont typeface="Calibri"/>
               <a:spcAft>
                 <a:spcPts val="1000"/>
               </a:spcAft>
+              <a:buSzPct val="100000"/>
               <a:buChar char="•"/>
               <a:lnSpc>
                 <a:spcPts val="2200"/>
@@ -4901,10 +4925,12 @@
             </a:r>
           </a:p>
           <a:p>
-            <a:pPr>
+            <a:pPr lvl="0" marL="457200" indent="-228600">
+              <a:buFont typeface="Calibri"/>
               <a:spcAft>
                 <a:spcPts val="1000"/>
               </a:spcAft>
+              <a:buSzPct val="100000"/>
               <a:buChar char="•"/>
               <a:lnSpc>
                 <a:spcPts val="2200"/>
@@ -4921,10 +4947,12 @@
             </a:r>
           </a:p>
           <a:p>
-            <a:pPr>
+            <a:pPr lvl="0" marL="457200" indent="-228600">
+              <a:buFont typeface="Calibri"/>
               <a:spcAft>
                 <a:spcPts val="1000"/>
               </a:spcAft>
+              <a:buSzPct val="100000"/>
               <a:buChar char="•"/>
               <a:lnSpc>
                 <a:spcPts val="2200"/>
@@ -4941,10 +4969,12 @@
             </a:r>
           </a:p>
           <a:p>
-            <a:pPr>
+            <a:pPr lvl="0" marL="457200" indent="-228600">
+              <a:buFont typeface="Calibri"/>
               <a:spcAft>
                 <a:spcPts val="1000"/>
               </a:spcAft>
+              <a:buSzPct val="100000"/>
               <a:buChar char="•"/>
               <a:lnSpc>
                 <a:spcPts val="2200"/>
@@ -5524,10 +5554,12 @@
           </a:bodyPr>
           <a:lstStyle/>
           <a:p>
-            <a:pPr>
+            <a:pPr lvl="0" marL="457200" indent="-228600">
+              <a:buFont typeface="Calibri"/>
               <a:spcAft>
                 <a:spcPts val="1000"/>
               </a:spcAft>
+              <a:buSzPct val="100000"/>
               <a:buChar char="•"/>
               <a:lnSpc>
                 <a:spcPts val="2200"/>
@@ -5544,10 +5576,12 @@
             </a:r>
           </a:p>
           <a:p>
-            <a:pPr>
+            <a:pPr lvl="0" marL="457200" indent="-228600">
+              <a:buFont typeface="Calibri"/>
               <a:spcAft>
                 <a:spcPts val="1000"/>
               </a:spcAft>
+              <a:buSzPct val="100000"/>
               <a:buChar char="•"/>
               <a:lnSpc>
                 <a:spcPts val="2200"/>
@@ -5564,10 +5598,12 @@
             </a:r>
           </a:p>
           <a:p>
-            <a:pPr>
+            <a:pPr lvl="0" marL="457200" indent="-228600">
+              <a:buFont typeface="Calibri"/>
               <a:spcAft>
                 <a:spcPts val="1000"/>
               </a:spcAft>
+              <a:buSzPct val="100000"/>
               <a:buChar char="•"/>
               <a:lnSpc>
                 <a:spcPts val="2200"/>
@@ -5703,10 +5739,12 @@
           </a:bodyPr>
           <a:lstStyle/>
           <a:p>
-            <a:pPr>
+            <a:pPr lvl="0" marL="457200" indent="-228600">
+              <a:buFont typeface="Calibri"/>
               <a:spcAft>
                 <a:spcPts val="1000"/>
               </a:spcAft>
+              <a:buSzPct val="100000"/>
               <a:buChar char="•"/>
               <a:lnSpc>
                 <a:spcPts val="2200"/>
@@ -5723,10 +5761,12 @@
             </a:r>
           </a:p>
           <a:p>
-            <a:pPr>
+            <a:pPr lvl="0" marL="457200" indent="-228600">
+              <a:buFont typeface="Calibri"/>
               <a:spcAft>
                 <a:spcPts val="1000"/>
               </a:spcAft>
+              <a:buSzPct val="100000"/>
               <a:buChar char="•"/>
               <a:lnSpc>
                 <a:spcPts val="2200"/>
